--- a/launch/rs/design/deck-product/라라슈_상품소개서_v2.pptx
+++ b/launch/rs/design/deck-product/라라슈_상품소개서_v2.pptx
@@ -1544,7 +1544,7 @@
       </p:grpSpPr>
       <p:pic>
         <p:nvPicPr>
-          <p:cNvPr id="2" name="lockup" descr="/home/user/harness-system/launch/rs/design/fair-print/assets/rs-lockup-lime.png"/>
+          <p:cNvPr id="2" name="lockup" descr="RS 로고"/>
           <p:cNvPicPr>
             <a:picLocks noChangeAspect="1"/>
           </p:cNvPicPr>
@@ -1558,8 +1558,8 @@
         </p:blipFill>
         <p:spPr>
           <a:xfrm>
-            <a:off x="548640" y="502920"/>
-            <a:ext cx="440495" cy="458849"/>
+            <a:off x="548640" y="457200"/>
+            <a:ext cx="777240" cy="636890"/>
           </a:xfrm>
           <a:prstGeom prst="rect">
             <a:avLst/>
@@ -1703,7 +1703,7 @@
       </p:sp>
       <p:pic>
         <p:nvPicPr>
-          <p:cNvPr id="13" name="walking" descr="/home/user/harness-system/launch/rs/design/fair-print/assets/walking-cut.png"/>
+          <p:cNvPr id="13" name="walking" descr="쿼드그립 종일편한 워킹화"/>
           <p:cNvPicPr>
             <a:picLocks noChangeAspect="1"/>
           </p:cNvPicPr>
@@ -1727,7 +1727,7 @@
       </p:pic>
       <p:pic>
         <p:nvPicPr>
-          <p:cNvPr id="14" name="insole" descr="/home/user/harness-system/launch/rs/design/fair-print/assets/insole-cut.png"/>
+          <p:cNvPr id="14" name="insole" descr="쿼드그립 아치가득 인솔"/>
           <p:cNvPicPr>
             <a:picLocks noChangeAspect="1"/>
           </p:cNvPicPr>
@@ -1866,7 +1866,7 @@
         <p:spPr>
           <a:xfrm>
             <a:off x="5715000" y="4617720"/>
-            <a:ext cx="2926080" cy="274320"/>
+            <a:ext cx="3200400" cy="274320"/>
           </a:xfrm>
           <a:prstGeom prst="rect">
             <a:avLst/>
@@ -1882,28 +1882,12 @@
               <a:buNone/>
             </a:pPr>
             <a:r>
-              <a:rPr lang="en-US" sz="1000" dirty="0">
+              <a:rPr lang="ko-KR" altLang="en-US" sz="1000" dirty="0">
                 <a:solidFill>
                   <a:schemeClr val="accent3"/>
                 </a:solidFill>
               </a:rPr>
-              <a:t>㈜</a:t>
-            </a:r>
-            <a:r>
-              <a:rPr lang="ko-KR" altLang="en-US" sz="1000" dirty="0" err="1">
-                <a:solidFill>
-                  <a:schemeClr val="accent3"/>
-                </a:solidFill>
-              </a:rPr>
-              <a:t>라라슈</a:t>
-            </a:r>
-            <a:r>
-              <a:rPr lang="en-US" sz="1000" dirty="0">
-                <a:solidFill>
-                  <a:schemeClr val="accent3"/>
-                </a:solidFill>
-              </a:rPr>
-              <a:t> · 2026.10</a:t>
+              <a:t>라라슈 RhaRa Shoe  ·  ㈜알앤디메이커스  ·  2026.10</a:t>
             </a:r>
             <a:endParaRPr lang="en-US" sz="1000" dirty="0"/>
           </a:p>
@@ -4283,7 +4267,7 @@
       </p:sp>
       <p:pic>
         <p:nvPicPr>
-          <p:cNvPr id="3" name="insole-hero" descr="/home/user/harness-system/launch/rs/design/deck-product/img-insole-hero.jpg"/>
+          <p:cNvPr id="3" name="insole-hero" descr="라라슈 쿼드그립 아치가득 인솔"/>
           <p:cNvPicPr>
             <a:picLocks noChangeAspect="1"/>
           </p:cNvPicPr>
@@ -4296,8 +4280,8 @@
         </p:blipFill>
         <p:spPr>
           <a:xfrm>
-            <a:off x="5943600" y="1051560"/>
-            <a:ext cx="2743200" cy="3429000"/>
+            <a:off x="5943600" y="1325880"/>
+            <a:ext cx="2743200" cy="2743200"/>
           </a:xfrm>
           <a:prstGeom prst="rect">
             <a:avLst/>
@@ -6369,7 +6353,7 @@
       </p:sp>
       <p:pic>
         <p:nvPicPr>
-          <p:cNvPr id="23" name="qr" descr="/home/user/harness-system/launch/rs/design/deck-product/img-qr-deck.png"/>
+          <p:cNvPr id="23" name="qr" descr="구매·오픈 알림 QR"/>
           <p:cNvPicPr>
             <a:picLocks noChangeAspect="1"/>
           </p:cNvPicPr>
